--- a/files/meta-teaching/Lecture2.pptx
+++ b/files/meta-teaching/Lecture2.pptx
@@ -239,7 +239,7 @@
           <a:p>
             <a:fld id="{9F6D67DF-CF82-44E4-9FB6-564B8C4C207B}" type="datetimeFigureOut">
               <a:rPr lang="zh-CN" altLang="en-US" smtClean="0"/>
-              <a:t>2024/5/20</a:t>
+              <a:t>2024/9/22</a:t>
             </a:fld>
             <a:endParaRPr lang="zh-CN" altLang="en-US"/>
           </a:p>
@@ -1859,7 +1859,7 @@
           <a:p>
             <a:fld id="{C18EDF5E-578C-4F7F-BA8F-EE7896D35C60}" type="datetimeFigureOut">
               <a:rPr lang="zh-CN" altLang="en-US" smtClean="0"/>
-              <a:t>2024/5/20</a:t>
+              <a:t>2024/9/22</a:t>
             </a:fld>
             <a:endParaRPr lang="zh-CN" altLang="en-US"/>
           </a:p>
@@ -2159,7 +2159,7 @@
           <a:p>
             <a:fld id="{C18EDF5E-578C-4F7F-BA8F-EE7896D35C60}" type="datetimeFigureOut">
               <a:rPr lang="zh-CN" altLang="en-US" smtClean="0"/>
-              <a:t>2024/5/20</a:t>
+              <a:t>2024/9/22</a:t>
             </a:fld>
             <a:endParaRPr lang="zh-CN" altLang="en-US"/>
           </a:p>
@@ -2369,7 +2369,7 @@
           <a:p>
             <a:fld id="{C18EDF5E-578C-4F7F-BA8F-EE7896D35C60}" type="datetimeFigureOut">
               <a:rPr lang="zh-CN" altLang="en-US" smtClean="0"/>
-              <a:t>2024/5/20</a:t>
+              <a:t>2024/9/22</a:t>
             </a:fld>
             <a:endParaRPr lang="zh-CN" altLang="en-US"/>
           </a:p>
@@ -2589,7 +2589,7 @@
           <a:p>
             <a:fld id="{C18EDF5E-578C-4F7F-BA8F-EE7896D35C60}" type="datetimeFigureOut">
               <a:rPr lang="zh-CN" altLang="en-US" smtClean="0"/>
-              <a:t>2024/5/20</a:t>
+              <a:t>2024/9/22</a:t>
             </a:fld>
             <a:endParaRPr lang="zh-CN" altLang="en-US"/>
           </a:p>
@@ -2708,7 +2708,7 @@
           <a:p>
             <a:fld id="{D67E1CCE-4C69-481E-8A82-8C3A41A945F4}" type="datetimeFigureOut">
               <a:rPr lang="zh-CN" altLang="en-US" smtClean="0"/>
-              <a:t>2024/5/20</a:t>
+              <a:t>2024/9/22</a:t>
             </a:fld>
             <a:endParaRPr lang="zh-CN" altLang="en-US"/>
           </a:p>
@@ -3476,7 +3476,7 @@
                 </a:solidFill>
               </a:rPr>
               <a:pPr/>
-              <a:t>2024/5/20</a:t>
+              <a:t>2024/9/22</a:t>
             </a:fld>
             <a:endParaRPr lang="zh-CN" altLang="en-US">
               <a:solidFill>
@@ -3706,7 +3706,7 @@
                 </a:solidFill>
               </a:rPr>
               <a:pPr/>
-              <a:t>2024/5/20</a:t>
+              <a:t>2024/9/22</a:t>
             </a:fld>
             <a:endParaRPr lang="zh-CN" altLang="en-US">
               <a:solidFill>
@@ -3955,7 +3955,7 @@
           <a:p>
             <a:fld id="{C18EDF5E-578C-4F7F-BA8F-EE7896D35C60}" type="datetimeFigureOut">
               <a:rPr lang="zh-CN" altLang="en-US" smtClean="0"/>
-              <a:t>2024/5/20</a:t>
+              <a:t>2024/9/22</a:t>
             </a:fld>
             <a:endParaRPr lang="zh-CN" altLang="en-US"/>
           </a:p>
@@ -4242,7 +4242,7 @@
           <a:p>
             <a:fld id="{C18EDF5E-578C-4F7F-BA8F-EE7896D35C60}" type="datetimeFigureOut">
               <a:rPr lang="zh-CN" altLang="en-US" smtClean="0"/>
-              <a:t>2024/5/20</a:t>
+              <a:t>2024/9/22</a:t>
             </a:fld>
             <a:endParaRPr lang="zh-CN" altLang="en-US"/>
           </a:p>
@@ -4519,7 +4519,7 @@
           <a:p>
             <a:fld id="{C18EDF5E-578C-4F7F-BA8F-EE7896D35C60}" type="datetimeFigureOut">
               <a:rPr lang="zh-CN" altLang="en-US" smtClean="0"/>
-              <a:t>2024/5/20</a:t>
+              <a:t>2024/9/22</a:t>
             </a:fld>
             <a:endParaRPr lang="zh-CN" altLang="en-US"/>
           </a:p>
@@ -4943,7 +4943,7 @@
           <a:p>
             <a:fld id="{C18EDF5E-578C-4F7F-BA8F-EE7896D35C60}" type="datetimeFigureOut">
               <a:rPr lang="zh-CN" altLang="en-US" smtClean="0"/>
-              <a:t>2024/5/20</a:t>
+              <a:t>2024/9/22</a:t>
             </a:fld>
             <a:endParaRPr lang="zh-CN" altLang="en-US"/>
           </a:p>
@@ -5367,7 +5367,7 @@
           <a:p>
             <a:fld id="{C18EDF5E-578C-4F7F-BA8F-EE7896D35C60}" type="datetimeFigureOut">
               <a:rPr lang="zh-CN" altLang="en-US" smtClean="0"/>
-              <a:t>2024/5/20</a:t>
+              <a:t>2024/9/22</a:t>
             </a:fld>
             <a:endParaRPr lang="zh-CN" altLang="en-US"/>
           </a:p>
@@ -5621,7 +5621,7 @@
           <a:p>
             <a:fld id="{C18EDF5E-578C-4F7F-BA8F-EE7896D35C60}" type="datetimeFigureOut">
               <a:rPr lang="zh-CN" altLang="en-US" smtClean="0"/>
-              <a:t>2024/5/20</a:t>
+              <a:t>2024/9/22</a:t>
             </a:fld>
             <a:endParaRPr lang="zh-CN" altLang="en-US"/>
           </a:p>
@@ -5746,7 +5746,7 @@
           <a:p>
             <a:fld id="{C18EDF5E-578C-4F7F-BA8F-EE7896D35C60}" type="datetimeFigureOut">
               <a:rPr lang="zh-CN" altLang="en-US" smtClean="0"/>
-              <a:t>2024/5/20</a:t>
+              <a:t>2024/9/22</a:t>
             </a:fld>
             <a:endParaRPr lang="zh-CN" altLang="en-US"/>
           </a:p>
@@ -6069,7 +6069,7 @@
           <a:p>
             <a:fld id="{C18EDF5E-578C-4F7F-BA8F-EE7896D35C60}" type="datetimeFigureOut">
               <a:rPr lang="zh-CN" altLang="en-US" smtClean="0"/>
-              <a:t>2024/5/20</a:t>
+              <a:t>2024/9/22</a:t>
             </a:fld>
             <a:endParaRPr lang="zh-CN" altLang="en-US"/>
           </a:p>
@@ -6331,7 +6331,7 @@
           <a:p>
             <a:fld id="{C18EDF5E-578C-4F7F-BA8F-EE7896D35C60}" type="datetimeFigureOut">
               <a:rPr lang="zh-CN" altLang="en-US" smtClean="0"/>
-              <a:t>2024/5/20</a:t>
+              <a:t>2024/9/22</a:t>
             </a:fld>
             <a:endParaRPr lang="zh-CN" altLang="en-US"/>
           </a:p>
@@ -20601,7 +20601,7 @@
         <p:spPr>
           <a:xfrm>
             <a:off x="979905" y="1490008"/>
-            <a:ext cx="10069095" cy="4739759"/>
+            <a:ext cx="10069095" cy="5109091"/>
           </a:xfrm>
           <a:prstGeom prst="rect">
             <a:avLst/>
@@ -20795,14 +20795,14 @@
               <a:t>语言程序（具体要求详见</a:t>
             </a:r>
             <a:r>
-              <a:rPr lang="en-US" altLang="zh-CN" sz="2400" dirty="0" err="1">
+              <a:rPr lang="en-US" altLang="zh-CN" sz="2400" dirty="0">
                 <a:solidFill>
                   <a:srgbClr val="2B3E54"/>
                 </a:solidFill>
                 <a:cs typeface="+mn-ea"/>
                 <a:sym typeface="+mn-lt"/>
               </a:rPr>
-              <a:t>main.c</a:t>
+              <a:t>https://github.com/Meta-Team/Meta-Software-Teaching</a:t>
             </a:r>
             <a:r>
               <a:rPr lang="zh-CN" altLang="en-US" sz="2400" dirty="0">

--- a/files/meta-teaching/Lecture2.pptx
+++ b/files/meta-teaching/Lecture2.pptx
@@ -239,7 +239,7 @@
           <a:p>
             <a:fld id="{9F6D67DF-CF82-44E4-9FB6-564B8C4C207B}" type="datetimeFigureOut">
               <a:rPr lang="zh-CN" altLang="en-US" smtClean="0"/>
-              <a:t>2024/9/22</a:t>
+              <a:t>2024/10/19</a:t>
             </a:fld>
             <a:endParaRPr lang="zh-CN" altLang="en-US"/>
           </a:p>
@@ -1859,7 +1859,7 @@
           <a:p>
             <a:fld id="{C18EDF5E-578C-4F7F-BA8F-EE7896D35C60}" type="datetimeFigureOut">
               <a:rPr lang="zh-CN" altLang="en-US" smtClean="0"/>
-              <a:t>2024/9/22</a:t>
+              <a:t>2024/10/19</a:t>
             </a:fld>
             <a:endParaRPr lang="zh-CN" altLang="en-US"/>
           </a:p>
@@ -2159,7 +2159,7 @@
           <a:p>
             <a:fld id="{C18EDF5E-578C-4F7F-BA8F-EE7896D35C60}" type="datetimeFigureOut">
               <a:rPr lang="zh-CN" altLang="en-US" smtClean="0"/>
-              <a:t>2024/9/22</a:t>
+              <a:t>2024/10/19</a:t>
             </a:fld>
             <a:endParaRPr lang="zh-CN" altLang="en-US"/>
           </a:p>
@@ -2369,7 +2369,7 @@
           <a:p>
             <a:fld id="{C18EDF5E-578C-4F7F-BA8F-EE7896D35C60}" type="datetimeFigureOut">
               <a:rPr lang="zh-CN" altLang="en-US" smtClean="0"/>
-              <a:t>2024/9/22</a:t>
+              <a:t>2024/10/19</a:t>
             </a:fld>
             <a:endParaRPr lang="zh-CN" altLang="en-US"/>
           </a:p>
@@ -2589,7 +2589,7 @@
           <a:p>
             <a:fld id="{C18EDF5E-578C-4F7F-BA8F-EE7896D35C60}" type="datetimeFigureOut">
               <a:rPr lang="zh-CN" altLang="en-US" smtClean="0"/>
-              <a:t>2024/9/22</a:t>
+              <a:t>2024/10/19</a:t>
             </a:fld>
             <a:endParaRPr lang="zh-CN" altLang="en-US"/>
           </a:p>
@@ -2708,7 +2708,7 @@
           <a:p>
             <a:fld id="{D67E1CCE-4C69-481E-8A82-8C3A41A945F4}" type="datetimeFigureOut">
               <a:rPr lang="zh-CN" altLang="en-US" smtClean="0"/>
-              <a:t>2024/9/22</a:t>
+              <a:t>2024/10/19</a:t>
             </a:fld>
             <a:endParaRPr lang="zh-CN" altLang="en-US"/>
           </a:p>
@@ -3476,7 +3476,7 @@
                 </a:solidFill>
               </a:rPr>
               <a:pPr/>
-              <a:t>2024/9/22</a:t>
+              <a:t>2024/10/19</a:t>
             </a:fld>
             <a:endParaRPr lang="zh-CN" altLang="en-US">
               <a:solidFill>
@@ -3706,7 +3706,7 @@
                 </a:solidFill>
               </a:rPr>
               <a:pPr/>
-              <a:t>2024/9/22</a:t>
+              <a:t>2024/10/19</a:t>
             </a:fld>
             <a:endParaRPr lang="zh-CN" altLang="en-US">
               <a:solidFill>
@@ -3955,7 +3955,7 @@
           <a:p>
             <a:fld id="{C18EDF5E-578C-4F7F-BA8F-EE7896D35C60}" type="datetimeFigureOut">
               <a:rPr lang="zh-CN" altLang="en-US" smtClean="0"/>
-              <a:t>2024/9/22</a:t>
+              <a:t>2024/10/19</a:t>
             </a:fld>
             <a:endParaRPr lang="zh-CN" altLang="en-US"/>
           </a:p>
@@ -4242,7 +4242,7 @@
           <a:p>
             <a:fld id="{C18EDF5E-578C-4F7F-BA8F-EE7896D35C60}" type="datetimeFigureOut">
               <a:rPr lang="zh-CN" altLang="en-US" smtClean="0"/>
-              <a:t>2024/9/22</a:t>
+              <a:t>2024/10/19</a:t>
             </a:fld>
             <a:endParaRPr lang="zh-CN" altLang="en-US"/>
           </a:p>
@@ -4519,7 +4519,7 @@
           <a:p>
             <a:fld id="{C18EDF5E-578C-4F7F-BA8F-EE7896D35C60}" type="datetimeFigureOut">
               <a:rPr lang="zh-CN" altLang="en-US" smtClean="0"/>
-              <a:t>2024/9/22</a:t>
+              <a:t>2024/10/19</a:t>
             </a:fld>
             <a:endParaRPr lang="zh-CN" altLang="en-US"/>
           </a:p>
@@ -4943,7 +4943,7 @@
           <a:p>
             <a:fld id="{C18EDF5E-578C-4F7F-BA8F-EE7896D35C60}" type="datetimeFigureOut">
               <a:rPr lang="zh-CN" altLang="en-US" smtClean="0"/>
-              <a:t>2024/9/22</a:t>
+              <a:t>2024/10/19</a:t>
             </a:fld>
             <a:endParaRPr lang="zh-CN" altLang="en-US"/>
           </a:p>
@@ -5367,7 +5367,7 @@
           <a:p>
             <a:fld id="{C18EDF5E-578C-4F7F-BA8F-EE7896D35C60}" type="datetimeFigureOut">
               <a:rPr lang="zh-CN" altLang="en-US" smtClean="0"/>
-              <a:t>2024/9/22</a:t>
+              <a:t>2024/10/19</a:t>
             </a:fld>
             <a:endParaRPr lang="zh-CN" altLang="en-US"/>
           </a:p>
@@ -5621,7 +5621,7 @@
           <a:p>
             <a:fld id="{C18EDF5E-578C-4F7F-BA8F-EE7896D35C60}" type="datetimeFigureOut">
               <a:rPr lang="zh-CN" altLang="en-US" smtClean="0"/>
-              <a:t>2024/9/22</a:t>
+              <a:t>2024/10/19</a:t>
             </a:fld>
             <a:endParaRPr lang="zh-CN" altLang="en-US"/>
           </a:p>
@@ -5746,7 +5746,7 @@
           <a:p>
             <a:fld id="{C18EDF5E-578C-4F7F-BA8F-EE7896D35C60}" type="datetimeFigureOut">
               <a:rPr lang="zh-CN" altLang="en-US" smtClean="0"/>
-              <a:t>2024/9/22</a:t>
+              <a:t>2024/10/19</a:t>
             </a:fld>
             <a:endParaRPr lang="zh-CN" altLang="en-US"/>
           </a:p>
@@ -6069,7 +6069,7 @@
           <a:p>
             <a:fld id="{C18EDF5E-578C-4F7F-BA8F-EE7896D35C60}" type="datetimeFigureOut">
               <a:rPr lang="zh-CN" altLang="en-US" smtClean="0"/>
-              <a:t>2024/9/22</a:t>
+              <a:t>2024/10/19</a:t>
             </a:fld>
             <a:endParaRPr lang="zh-CN" altLang="en-US"/>
           </a:p>
@@ -6331,7 +6331,7 @@
           <a:p>
             <a:fld id="{C18EDF5E-578C-4F7F-BA8F-EE7896D35C60}" type="datetimeFigureOut">
               <a:rPr lang="zh-CN" altLang="en-US" smtClean="0"/>
-              <a:t>2024/9/22</a:t>
+              <a:t>2024/10/19</a:t>
             </a:fld>
             <a:endParaRPr lang="zh-CN" altLang="en-US"/>
           </a:p>
@@ -20601,7 +20601,7 @@
         <p:spPr>
           <a:xfrm>
             <a:off x="979905" y="1490008"/>
-            <a:ext cx="10069095" cy="5109091"/>
+            <a:ext cx="10069095" cy="3631763"/>
           </a:xfrm>
           <a:prstGeom prst="rect">
             <a:avLst/>
@@ -20772,17 +20772,17 @@
                 <a:cs typeface="+mn-ea"/>
                 <a:sym typeface="+mn-lt"/>
               </a:rPr>
-              <a:t>编写</a:t>
-            </a:r>
-            <a:r>
-              <a:rPr lang="en-US" altLang="zh-CN" sz="2400" dirty="0">
+              <a:t>使用</a:t>
+            </a:r>
+            <a:r>
+              <a:rPr lang="en-US" altLang="zh-CN" sz="2400" dirty="0" err="1">
                 <a:solidFill>
                   <a:srgbClr val="2B3E54"/>
                 </a:solidFill>
                 <a:cs typeface="+mn-ea"/>
                 <a:sym typeface="+mn-lt"/>
               </a:rPr>
-              <a:t>C</a:t>
+              <a:t>Makefile</a:t>
             </a:r>
             <a:r>
               <a:rPr lang="zh-CN" altLang="en-US" sz="2400" dirty="0">
@@ -20792,17 +20792,17 @@
                 <a:cs typeface="+mn-ea"/>
                 <a:sym typeface="+mn-lt"/>
               </a:rPr>
-              <a:t>语言程序（具体要求详见</a:t>
-            </a:r>
-            <a:r>
-              <a:rPr lang="en-US" altLang="zh-CN" sz="2400" dirty="0">
+              <a:t>和</a:t>
+            </a:r>
+            <a:r>
+              <a:rPr lang="en-US" altLang="zh-CN" sz="2400" dirty="0" err="1">
                 <a:solidFill>
                   <a:srgbClr val="2B3E54"/>
                 </a:solidFill>
                 <a:cs typeface="+mn-ea"/>
                 <a:sym typeface="+mn-lt"/>
               </a:rPr>
-              <a:t>https://github.com/Meta-Team/Meta-Software-Teaching</a:t>
+              <a:t>Cmake</a:t>
             </a:r>
             <a:r>
               <a:rPr lang="zh-CN" altLang="en-US" sz="2400" dirty="0">
@@ -20812,7 +20812,37 @@
                 <a:cs typeface="+mn-ea"/>
                 <a:sym typeface="+mn-lt"/>
               </a:rPr>
-              <a:t>）</a:t>
+              <a:t>编译</a:t>
+            </a:r>
+            <a:r>
+              <a:rPr lang="en-US" altLang="zh-CN" sz="2400" dirty="0">
+                <a:solidFill>
+                  <a:srgbClr val="2B3E54"/>
+                </a:solidFill>
+                <a:cs typeface="+mn-ea"/>
+                <a:sym typeface="+mn-lt"/>
+              </a:rPr>
+              <a:t>C/C++</a:t>
+            </a:r>
+            <a:r>
+              <a:rPr lang="zh-CN" altLang="en-US" sz="2400" dirty="0">
+                <a:solidFill>
+                  <a:srgbClr val="2B3E54"/>
+                </a:solidFill>
+                <a:cs typeface="+mn-ea"/>
+                <a:sym typeface="+mn-lt"/>
+              </a:rPr>
+              <a:t>项目</a:t>
+            </a:r>
+            <a:r>
+              <a:rPr lang="zh-CN" altLang="en-US" sz="2400">
+                <a:solidFill>
+                  <a:srgbClr val="2B3E54"/>
+                </a:solidFill>
+                <a:cs typeface="+mn-ea"/>
+                <a:sym typeface="+mn-lt"/>
+              </a:rPr>
+              <a:t>，参加作业仓库</a:t>
             </a:r>
             <a:endParaRPr lang="en-US" altLang="zh-CN" sz="2400" dirty="0">
               <a:solidFill>
@@ -20823,40 +20853,6 @@
             </a:endParaRPr>
           </a:p>
           <a:p>
-            <a:pPr marL="342900" indent="-342900">
-              <a:buFont typeface="Arial" panose="020B0604020202020204" pitchFamily="34" charset="0"/>
-              <a:buChar char="•"/>
-            </a:pPr>
-            <a:r>
-              <a:rPr lang="zh-CN" altLang="en-US" sz="2400" dirty="0">
-                <a:solidFill>
-                  <a:srgbClr val="2B3E54"/>
-                </a:solidFill>
-                <a:cs typeface="+mn-ea"/>
-                <a:sym typeface="+mn-lt"/>
-              </a:rPr>
-              <a:t>打印</a:t>
-            </a:r>
-            <a:r>
-              <a:rPr lang="en-US" altLang="zh-CN" sz="2400" dirty="0">
-                <a:solidFill>
-                  <a:srgbClr val="2B3E54"/>
-                </a:solidFill>
-                <a:cs typeface="+mn-ea"/>
-                <a:sym typeface="+mn-lt"/>
-              </a:rPr>
-              <a:t>0~99</a:t>
-            </a:r>
-            <a:r>
-              <a:rPr lang="zh-CN" altLang="en-US" sz="2400" dirty="0">
-                <a:solidFill>
-                  <a:srgbClr val="2B3E54"/>
-                </a:solidFill>
-                <a:cs typeface="+mn-ea"/>
-                <a:sym typeface="+mn-lt"/>
-              </a:rPr>
-              <a:t>的所有整数</a:t>
-            </a:r>
             <a:endParaRPr lang="en-US" altLang="zh-CN" sz="2400" dirty="0">
               <a:solidFill>
                 <a:srgbClr val="2B3E54"/>
@@ -20866,81 +20862,6 @@
             </a:endParaRPr>
           </a:p>
           <a:p>
-            <a:pPr marL="342900" indent="-342900">
-              <a:buFont typeface="Arial" panose="020B0604020202020204" pitchFamily="34" charset="0"/>
-              <a:buChar char="•"/>
-            </a:pPr>
-            <a:r>
-              <a:rPr lang="zh-CN" altLang="en-US" sz="2400" dirty="0">
-                <a:solidFill>
-                  <a:srgbClr val="2B3E54"/>
-                </a:solidFill>
-                <a:cs typeface="+mn-ea"/>
-                <a:sym typeface="+mn-lt"/>
-              </a:rPr>
-              <a:t>打印</a:t>
-            </a:r>
-            <a:r>
-              <a:rPr lang="en-US" altLang="zh-CN" sz="2400" dirty="0">
-                <a:solidFill>
-                  <a:srgbClr val="2B3E54"/>
-                </a:solidFill>
-                <a:cs typeface="+mn-ea"/>
-                <a:sym typeface="+mn-lt"/>
-              </a:rPr>
-              <a:t>0~99</a:t>
-            </a:r>
-            <a:r>
-              <a:rPr lang="zh-CN" altLang="en-US" sz="2400" dirty="0">
-                <a:solidFill>
-                  <a:srgbClr val="2B3E54"/>
-                </a:solidFill>
-                <a:cs typeface="+mn-ea"/>
-                <a:sym typeface="+mn-lt"/>
-              </a:rPr>
-              <a:t>所有质数</a:t>
-            </a:r>
-            <a:endParaRPr lang="en-US" altLang="zh-CN" sz="2400" dirty="0">
-              <a:solidFill>
-                <a:srgbClr val="2B3E54"/>
-              </a:solidFill>
-              <a:cs typeface="+mn-ea"/>
-              <a:sym typeface="+mn-lt"/>
-            </a:endParaRPr>
-          </a:p>
-          <a:p>
-            <a:pPr marL="342900" indent="-342900">
-              <a:buFont typeface="Arial" panose="020B0604020202020204" pitchFamily="34" charset="0"/>
-              <a:buChar char="•"/>
-            </a:pPr>
-            <a:r>
-              <a:rPr lang="zh-CN" altLang="en-US" sz="2400" dirty="0">
-                <a:solidFill>
-                  <a:srgbClr val="2B3E54"/>
-                </a:solidFill>
-                <a:cs typeface="+mn-ea"/>
-                <a:sym typeface="+mn-lt"/>
-              </a:rPr>
-              <a:t>给定一个数组，完成排序算法</a:t>
-            </a:r>
-            <a:endParaRPr lang="en-US" altLang="zh-CN" sz="2400" dirty="0">
-              <a:solidFill>
-                <a:srgbClr val="2B3E54"/>
-              </a:solidFill>
-              <a:cs typeface="+mn-ea"/>
-              <a:sym typeface="+mn-lt"/>
-            </a:endParaRPr>
-          </a:p>
-          <a:p>
-            <a:endParaRPr lang="en-US" altLang="zh-CN" sz="2400" dirty="0">
-              <a:solidFill>
-                <a:srgbClr val="2B3E54"/>
-              </a:solidFill>
-              <a:cs typeface="+mn-ea"/>
-              <a:sym typeface="+mn-lt"/>
-            </a:endParaRPr>
-          </a:p>
-          <a:p>
             <a:r>
               <a:rPr lang="en-US" altLang="zh-CN" sz="2400" dirty="0">
                 <a:solidFill>
@@ -20959,7 +20880,7 @@
                 <a:cs typeface="+mn-ea"/>
                 <a:sym typeface="+mn-lt"/>
               </a:rPr>
-              <a:t>（可选）自行先开始学习</a:t>
+              <a:t>自行先开始学习</a:t>
             </a:r>
             <a:r>
               <a:rPr lang="en-US" altLang="zh-CN" sz="2400" dirty="0">
